--- a/Eagles Wings.pptx
+++ b/Eagles Wings.pptx
@@ -249,7 +249,7 @@
           <a:p>
             <a:fld id="{E759A0DE-F190-5444-87AC-4719D5F20D15}" type="datetimeFigureOut">
               <a:rPr lang="en-US" smtClean="0"/>
-              <a:t>8/1/26</a:t>
+              <a:t>10/1/26</a:t>
             </a:fld>
             <a:endParaRPr lang="en-US"/>
           </a:p>
@@ -419,7 +419,7 @@
           <a:p>
             <a:fld id="{E759A0DE-F190-5444-87AC-4719D5F20D15}" type="datetimeFigureOut">
               <a:rPr lang="en-US" smtClean="0"/>
-              <a:t>8/1/26</a:t>
+              <a:t>10/1/26</a:t>
             </a:fld>
             <a:endParaRPr lang="en-US"/>
           </a:p>
@@ -599,7 +599,7 @@
           <a:p>
             <a:fld id="{E759A0DE-F190-5444-87AC-4719D5F20D15}" type="datetimeFigureOut">
               <a:rPr lang="en-US" smtClean="0"/>
-              <a:t>8/1/26</a:t>
+              <a:t>10/1/26</a:t>
             </a:fld>
             <a:endParaRPr lang="en-US"/>
           </a:p>
@@ -769,7 +769,7 @@
           <a:p>
             <a:fld id="{E759A0DE-F190-5444-87AC-4719D5F20D15}" type="datetimeFigureOut">
               <a:rPr lang="en-US" smtClean="0"/>
-              <a:t>8/1/26</a:t>
+              <a:t>10/1/26</a:t>
             </a:fld>
             <a:endParaRPr lang="en-US"/>
           </a:p>
@@ -1015,7 +1015,7 @@
           <a:p>
             <a:fld id="{E759A0DE-F190-5444-87AC-4719D5F20D15}" type="datetimeFigureOut">
               <a:rPr lang="en-US" smtClean="0"/>
-              <a:t>8/1/26</a:t>
+              <a:t>10/1/26</a:t>
             </a:fld>
             <a:endParaRPr lang="en-US"/>
           </a:p>
@@ -1247,7 +1247,7 @@
           <a:p>
             <a:fld id="{E759A0DE-F190-5444-87AC-4719D5F20D15}" type="datetimeFigureOut">
               <a:rPr lang="en-US" smtClean="0"/>
-              <a:t>8/1/26</a:t>
+              <a:t>10/1/26</a:t>
             </a:fld>
             <a:endParaRPr lang="en-US"/>
           </a:p>
@@ -1614,7 +1614,7 @@
           <a:p>
             <a:fld id="{E759A0DE-F190-5444-87AC-4719D5F20D15}" type="datetimeFigureOut">
               <a:rPr lang="en-US" smtClean="0"/>
-              <a:t>8/1/26</a:t>
+              <a:t>10/1/26</a:t>
             </a:fld>
             <a:endParaRPr lang="en-US"/>
           </a:p>
@@ -1732,7 +1732,7 @@
           <a:p>
             <a:fld id="{E759A0DE-F190-5444-87AC-4719D5F20D15}" type="datetimeFigureOut">
               <a:rPr lang="en-US" smtClean="0"/>
-              <a:t>8/1/26</a:t>
+              <a:t>10/1/26</a:t>
             </a:fld>
             <a:endParaRPr lang="en-US"/>
           </a:p>
@@ -1827,7 +1827,7 @@
           <a:p>
             <a:fld id="{E759A0DE-F190-5444-87AC-4719D5F20D15}" type="datetimeFigureOut">
               <a:rPr lang="en-US" smtClean="0"/>
-              <a:t>8/1/26</a:t>
+              <a:t>10/1/26</a:t>
             </a:fld>
             <a:endParaRPr lang="en-US"/>
           </a:p>
@@ -2104,7 +2104,7 @@
           <a:p>
             <a:fld id="{E759A0DE-F190-5444-87AC-4719D5F20D15}" type="datetimeFigureOut">
               <a:rPr lang="en-US" smtClean="0"/>
-              <a:t>8/1/26</a:t>
+              <a:t>10/1/26</a:t>
             </a:fld>
             <a:endParaRPr lang="en-US"/>
           </a:p>
@@ -2361,7 +2361,7 @@
           <a:p>
             <a:fld id="{E759A0DE-F190-5444-87AC-4719D5F20D15}" type="datetimeFigureOut">
               <a:rPr lang="en-US" smtClean="0"/>
-              <a:t>8/1/26</a:t>
+              <a:t>10/1/26</a:t>
             </a:fld>
             <a:endParaRPr lang="en-US"/>
           </a:p>
@@ -2574,7 +2574,7 @@
           <a:p>
             <a:fld id="{E759A0DE-F190-5444-87AC-4719D5F20D15}" type="datetimeFigureOut">
               <a:rPr lang="en-US" smtClean="0"/>
-              <a:t>8/1/26</a:t>
+              <a:t>10/1/26</a:t>
             </a:fld>
             <a:endParaRPr lang="en-US"/>
           </a:p>
@@ -3169,7 +3169,7 @@
           </a:bodyPr>
           <a:lstStyle/>
           <a:p>
-            <a:endParaRPr lang="en-US" sz="4800" dirty="0">
+            <a:endParaRPr lang="en-US" sz="5400" dirty="0">
               <a:solidFill>
                 <a:srgbClr val="FFFF00"/>
               </a:solidFill>
@@ -3179,7 +3179,7 @@
           </a:p>
           <a:p>
             <a:r>
-              <a:rPr lang="en-US" sz="4800" dirty="0">
+              <a:rPr lang="en-US" sz="5400" dirty="0">
                 <a:solidFill>
                   <a:schemeClr val="bg1"/>
                 </a:solidFill>
@@ -3191,7 +3191,7 @@
           </a:p>
           <a:p>
             <a:r>
-              <a:rPr lang="en-US" sz="4800" dirty="0">
+              <a:rPr lang="en-US" sz="5400" dirty="0">
                 <a:solidFill>
                   <a:schemeClr val="bg1"/>
                 </a:solidFill>
@@ -3203,7 +3203,7 @@
           </a:p>
           <a:p>
             <a:r>
-              <a:rPr lang="en-US" sz="4800" dirty="0">
+              <a:rPr lang="en-US" sz="5400" dirty="0">
                 <a:solidFill>
                   <a:schemeClr val="bg1"/>
                 </a:solidFill>
@@ -3215,7 +3215,7 @@
           </a:p>
           <a:p>
             <a:r>
-              <a:rPr lang="en-US" sz="4800" dirty="0">
+              <a:rPr lang="en-US" sz="5400" dirty="0">
                 <a:solidFill>
                   <a:schemeClr val="bg1"/>
                 </a:solidFill>
@@ -3299,7 +3299,7 @@
           </a:bodyPr>
           <a:lstStyle/>
           <a:p>
-            <a:endParaRPr lang="en-US" sz="4800" dirty="0">
+            <a:endParaRPr lang="en-US" sz="5400" dirty="0">
               <a:solidFill>
                 <a:srgbClr val="FFFF00"/>
               </a:solidFill>
@@ -3309,7 +3309,7 @@
           </a:p>
           <a:p>
             <a:r>
-              <a:rPr lang="en-US" sz="4800" dirty="0">
+              <a:rPr lang="en-US" sz="5400" dirty="0">
                 <a:solidFill>
                   <a:schemeClr val="bg1"/>
                 </a:solidFill>
@@ -3321,7 +3321,7 @@
           </a:p>
           <a:p>
             <a:r>
-              <a:rPr lang="en-US" sz="4800" dirty="0">
+              <a:rPr lang="en-US" sz="5400" dirty="0">
                 <a:solidFill>
                   <a:schemeClr val="bg1"/>
                 </a:solidFill>
@@ -3333,7 +3333,7 @@
           </a:p>
           <a:p>
             <a:r>
-              <a:rPr lang="en-US" sz="4800" dirty="0">
+              <a:rPr lang="en-US" sz="5400" dirty="0">
                 <a:solidFill>
                   <a:schemeClr val="bg1"/>
                 </a:solidFill>
@@ -3345,7 +3345,7 @@
           </a:p>
           <a:p>
             <a:r>
-              <a:rPr lang="en-US" sz="4800" dirty="0">
+              <a:rPr lang="en-US" sz="5400" dirty="0">
                 <a:solidFill>
                   <a:schemeClr val="bg1"/>
                 </a:solidFill>
@@ -3429,7 +3429,7 @@
           </a:bodyPr>
           <a:lstStyle/>
           <a:p>
-            <a:endParaRPr lang="en-US" sz="4800" dirty="0">
+            <a:endParaRPr lang="en-US" sz="5400" dirty="0">
               <a:solidFill>
                 <a:schemeClr val="bg1"/>
               </a:solidFill>
@@ -3439,7 +3439,7 @@
           </a:p>
           <a:p>
             <a:r>
-              <a:rPr lang="en-US" sz="4800" dirty="0">
+              <a:rPr lang="en-US" sz="5400" dirty="0">
                 <a:solidFill>
                   <a:schemeClr val="bg1"/>
                 </a:solidFill>
@@ -3451,7 +3451,7 @@
           </a:p>
           <a:p>
             <a:r>
-              <a:rPr lang="en-US" sz="4800" dirty="0">
+              <a:rPr lang="en-US" sz="5400" dirty="0">
                 <a:solidFill>
                   <a:schemeClr val="bg1"/>
                 </a:solidFill>
@@ -3462,8 +3462,17 @@
             </a:r>
           </a:p>
           <a:p>
-            <a:r>
-              <a:rPr lang="en-US" sz="4800" dirty="0">
+            <a:endParaRPr lang="en-US" sz="5400" dirty="0">
+              <a:solidFill>
+                <a:schemeClr val="bg1"/>
+              </a:solidFill>
+              <a:latin typeface="Avenir Medium" panose="02000503020000020003" pitchFamily="2" charset="0"/>
+              <a:ea typeface="Bodoni Ornaments" pitchFamily="2" charset="0"/>
+            </a:endParaRPr>
+          </a:p>
+          <a:p>
+            <a:r>
+              <a:rPr lang="en-US" sz="5400" dirty="0">
                 <a:solidFill>
                   <a:schemeClr val="bg1"/>
                 </a:solidFill>
@@ -3475,7 +3484,7 @@
           </a:p>
           <a:p>
             <a:r>
-              <a:rPr lang="en-US" sz="4800" dirty="0">
+              <a:rPr lang="en-US" sz="5400" dirty="0">
                 <a:solidFill>
                   <a:schemeClr val="bg1"/>
                 </a:solidFill>
@@ -3559,7 +3568,7 @@
           </a:bodyPr>
           <a:lstStyle/>
           <a:p>
-            <a:endParaRPr lang="en-US" sz="4800" dirty="0">
+            <a:endParaRPr lang="en-US" sz="5400" dirty="0">
               <a:solidFill>
                 <a:schemeClr val="bg1"/>
               </a:solidFill>
@@ -3569,7 +3578,7 @@
           </a:p>
           <a:p>
             <a:r>
-              <a:rPr lang="en-US" sz="4800" dirty="0">
+              <a:rPr lang="en-US" sz="5400" dirty="0">
                 <a:solidFill>
                   <a:schemeClr val="bg1"/>
                 </a:solidFill>
@@ -3581,7 +3590,7 @@
           </a:p>
           <a:p>
             <a:r>
-              <a:rPr lang="en-US" sz="4800" dirty="0">
+              <a:rPr lang="en-US" sz="5400" dirty="0">
                 <a:solidFill>
                   <a:schemeClr val="bg1"/>
                 </a:solidFill>
@@ -3592,8 +3601,17 @@
             </a:r>
           </a:p>
           <a:p>
-            <a:r>
-              <a:rPr lang="en-US" sz="4800" dirty="0">
+            <a:br>
+              <a:rPr lang="en-US" sz="5400" dirty="0">
+                <a:solidFill>
+                  <a:schemeClr val="bg1"/>
+                </a:solidFill>
+                <a:latin typeface="Avenir Medium" panose="02000503020000020003" pitchFamily="2" charset="0"/>
+                <a:ea typeface="Bodoni Ornaments" pitchFamily="2" charset="0"/>
+              </a:rPr>
+            </a:br>
+            <a:r>
+              <a:rPr lang="en-US" sz="5400" dirty="0">
                 <a:solidFill>
                   <a:schemeClr val="bg1"/>
                 </a:solidFill>
@@ -3677,7 +3695,7 @@
           </a:bodyPr>
           <a:lstStyle/>
           <a:p>
-            <a:endParaRPr lang="en-US" sz="4800" dirty="0">
+            <a:endParaRPr lang="en-US" sz="5400" dirty="0">
               <a:solidFill>
                 <a:schemeClr val="bg1"/>
               </a:solidFill>
@@ -3687,7 +3705,7 @@
           </a:p>
           <a:p>
             <a:r>
-              <a:rPr lang="en-US" sz="4800" dirty="0">
+              <a:rPr lang="en-US" sz="5400" dirty="0">
                 <a:solidFill>
                   <a:schemeClr val="bg1"/>
                 </a:solidFill>
@@ -3698,8 +3716,17 @@
             </a:r>
           </a:p>
           <a:p>
-            <a:r>
-              <a:rPr lang="en-US" sz="4800" dirty="0">
+            <a:endParaRPr lang="en-US" sz="5400" dirty="0">
+              <a:solidFill>
+                <a:schemeClr val="bg1"/>
+              </a:solidFill>
+              <a:latin typeface="Avenir Medium" panose="02000503020000020003" pitchFamily="2" charset="0"/>
+              <a:ea typeface="Bodoni Ornaments" pitchFamily="2" charset="0"/>
+            </a:endParaRPr>
+          </a:p>
+          <a:p>
+            <a:r>
+              <a:rPr lang="en-US" sz="5400" dirty="0">
                 <a:solidFill>
                   <a:schemeClr val="bg1"/>
                 </a:solidFill>
@@ -3783,7 +3810,7 @@
           </a:bodyPr>
           <a:lstStyle/>
           <a:p>
-            <a:endParaRPr lang="en-US" sz="4800" dirty="0">
+            <a:endParaRPr lang="en-US" sz="5400" dirty="0">
               <a:solidFill>
                 <a:schemeClr val="bg1"/>
               </a:solidFill>
@@ -3793,7 +3820,7 @@
           </a:p>
           <a:p>
             <a:r>
-              <a:rPr lang="en-US" sz="4800" dirty="0">
+              <a:rPr lang="en-US" sz="5400" dirty="0">
                 <a:solidFill>
                   <a:schemeClr val="bg1"/>
                 </a:solidFill>
@@ -3805,7 +3832,7 @@
           </a:p>
           <a:p>
             <a:r>
-              <a:rPr lang="en-US" sz="4800" dirty="0">
+              <a:rPr lang="en-US" sz="5400" dirty="0">
                 <a:solidFill>
                   <a:schemeClr val="bg1"/>
                 </a:solidFill>
@@ -3816,8 +3843,17 @@
             </a:r>
           </a:p>
           <a:p>
-            <a:r>
-              <a:rPr lang="en-US" sz="4800" dirty="0">
+            <a:endParaRPr lang="en-US" sz="5400" dirty="0">
+              <a:solidFill>
+                <a:schemeClr val="bg1"/>
+              </a:solidFill>
+              <a:latin typeface="Avenir Medium" panose="02000503020000020003" pitchFamily="2" charset="0"/>
+              <a:ea typeface="Bodoni Ornaments" pitchFamily="2" charset="0"/>
+            </a:endParaRPr>
+          </a:p>
+          <a:p>
+            <a:r>
+              <a:rPr lang="en-US" sz="5400" dirty="0">
                 <a:solidFill>
                   <a:schemeClr val="bg1"/>
                 </a:solidFill>
@@ -3829,7 +3865,7 @@
           </a:p>
           <a:p>
             <a:r>
-              <a:rPr lang="en-US" sz="4800" dirty="0">
+              <a:rPr lang="en-US" sz="5400" dirty="0">
                 <a:solidFill>
                   <a:schemeClr val="bg1"/>
                 </a:solidFill>
